--- a/ISTAT Road Accidents – Capstone.pptx
+++ b/ISTAT Road Accidents – Capstone.pptx
@@ -4,6 +4,9 @@
   <p:sldMasterIdLst>
     <p:sldMasterId id="2147483648" r:id="rId1"/>
   </p:sldMasterIdLst>
+  <p:notesMasterIdLst>
+    <p:notesMasterId r:id="rId7"/>
+  </p:notesMasterIdLst>
   <p:sldIdLst>
     <p:sldId id="256" r:id="rId2"/>
     <p:sldId id="257" r:id="rId3"/>
@@ -11,9 +14,6 @@
     <p:sldId id="259" r:id="rId5"/>
     <p:sldId id="260" r:id="rId6"/>
   </p:sldIdLst>
-  <p:notesMasterIdLst>
-    <p:notesMasterId r:id="rId7"/>
-  </p:notesMasterIdLst>
   <p:sldSz cx="12192000" cy="6858000"/>
   <p:notesSz cx="6858000" cy="12192000"/>
   <p:defaultTextStyle>
@@ -108,6 +108,11 @@
       </a:defRPr>
     </a:lvl9pPr>
   </p:defaultTextStyle>
+  <p:extLst>
+    <p:ext uri="{EFAFB233-063F-42B5-8137-9DF3F51BA10A}">
+      <p15:sldGuideLst xmlns:p15="http://schemas.microsoft.com/office/powerpoint/2012/main"/>
+    </p:ext>
+  </p:extLst>
 </p:presentation>
 </file>
 
@@ -133,234 +138,10 @@
           <a:chExt cx="0" cy="0"/>
         </a:xfrm>
       </p:grpSpPr>
-      <p:sp>
-        <p:nvSpPr>
-          <p:cNvPr id="2" name="Header Placeholder 1"/>
-          <p:cNvSpPr>
-            <a:spLocks noGrp="1"/>
-          </p:cNvSpPr>
-          <p:nvPr>
-            <p:ph type="hdr" sz="quarter"/>
-          </p:nvPr>
-        </p:nvSpPr>
-        <p:spPr>
-          <a:xfrm>
-            <a:off x="0" y="0"/>
-            <a:ext cx="2971800" cy="458788"/>
-          </a:xfrm>
-          <a:prstGeom prst="rect">
-            <a:avLst/>
-          </a:prstGeom>
-        </p:spPr>
-        <p:txBody>
-          <a:bodyPr vert="horz" lIns="91440" tIns="45720" rIns="91440" bIns="45720" rtlCol="0"/>
-          <a:lstStyle>
-            <a:lvl1pPr algn="l">
-              <a:defRPr sz="1200"/>
-            </a:lvl1pPr>
-          </a:lstStyle>
-          <a:p>
-            <a:endParaRPr lang="en-US"/>
-          </a:p>
-        </p:txBody>
-      </p:sp>
-      <p:sp>
-        <p:nvSpPr>
-          <p:cNvPr id="3" name="Date Placeholder 2"/>
-          <p:cNvSpPr>
-            <a:spLocks noGrp="1"/>
-          </p:cNvSpPr>
-          <p:nvPr>
-            <p:ph type="dt" idx="1"/>
-          </p:nvPr>
-        </p:nvSpPr>
-        <p:spPr>
-          <a:xfrm>
-            <a:off x="3884613" y="0"/>
-            <a:ext cx="2971800" cy="458788"/>
-          </a:xfrm>
-          <a:prstGeom prst="rect">
-            <a:avLst/>
-          </a:prstGeom>
-        </p:spPr>
-        <p:txBody>
-          <a:bodyPr vert="horz" lIns="91440" tIns="45720" rIns="91440" bIns="45720" rtlCol="0"/>
-          <a:lstStyle>
-            <a:lvl1pPr algn="r">
-              <a:defRPr sz="1200"/>
-            </a:lvl1pPr>
-          </a:lstStyle>
-          <a:p>
-            <a:fld id="{5282F153-3F37-0F45-9E97-73ACFA13230C}" type="datetimeFigureOut">
-              <a:rPr lang="en-US"/>
-              <a:t>7/23/19</a:t>
-            </a:fld>
-            <a:endParaRPr lang="en-US"/>
-          </a:p>
-        </p:txBody>
-      </p:sp>
-      <p:sp>
-        <p:nvSpPr>
-          <p:cNvPr id="4" name="Slide Image Placeholder 3"/>
-          <p:cNvSpPr>
-            <a:spLocks noGrp="1" noRot="1" noChangeAspect="1"/>
-          </p:cNvSpPr>
-          <p:nvPr>
-            <p:ph type="sldImg" idx="2"/>
-          </p:nvPr>
-        </p:nvSpPr>
-        <p:spPr>
-          <a:xfrm>
-            <a:off x="685800" y="1143000"/>
-            <a:ext cx="5486400" cy="3086100"/>
-          </a:xfrm>
-          <a:prstGeom prst="rect">
-            <a:avLst/>
-          </a:prstGeom>
-          <a:noFill/>
-          <a:ln w="12700">
-            <a:solidFill>
-              <a:prstClr val="black"/>
-            </a:solidFill>
-          </a:ln>
-        </p:spPr>
-        <p:txBody>
-          <a:bodyPr vert="horz" lIns="91440" tIns="45720" rIns="91440" bIns="45720" rtlCol="0" anchor="ctr"/>
-          <a:lstStyle/>
-          <a:p>
-            <a:endParaRPr lang="en-US"/>
-          </a:p>
-        </p:txBody>
-      </p:sp>
-      <p:sp>
-        <p:nvSpPr>
-          <p:cNvPr id="5" name="Notes Placeholder 4"/>
-          <p:cNvSpPr>
-            <a:spLocks noGrp="1"/>
-          </p:cNvSpPr>
-          <p:nvPr>
-            <p:ph type="body" sz="quarter" idx="3"/>
-          </p:nvPr>
-        </p:nvSpPr>
-        <p:spPr>
-          <a:xfrm>
-            <a:off x="685800" y="4400550"/>
-            <a:ext cx="5486400" cy="3600450"/>
-          </a:xfrm>
-          <a:prstGeom prst="rect">
-            <a:avLst/>
-          </a:prstGeom>
-        </p:spPr>
-        <p:txBody>
-          <a:bodyPr vert="horz" lIns="91440" tIns="45720" rIns="91440" bIns="45720" rtlCol="0"/>
-          <a:lstStyle/>
-          <a:p>
-            <a:pPr lvl="0"/>
-            <a:r>
-              <a:rPr lang="en-US"/>
-              <a:t>Click to edit Master text styles</a:t>
-            </a:r>
-          </a:p>
-          <a:p>
-            <a:pPr lvl="1"/>
-            <a:r>
-              <a:rPr lang="en-US"/>
-              <a:t>Second level</a:t>
-            </a:r>
-          </a:p>
-          <a:p>
-            <a:pPr lvl="2"/>
-            <a:r>
-              <a:rPr lang="en-US"/>
-              <a:t>Third level</a:t>
-            </a:r>
-          </a:p>
-          <a:p>
-            <a:pPr lvl="3"/>
-            <a:r>
-              <a:rPr lang="en-US"/>
-              <a:t>Fourth level</a:t>
-            </a:r>
-          </a:p>
-          <a:p>
-            <a:pPr lvl="4"/>
-            <a:r>
-              <a:rPr lang="en-US"/>
-              <a:t>Fifth level</a:t>
-            </a:r>
-          </a:p>
-        </p:txBody>
-      </p:sp>
-      <p:sp>
-        <p:nvSpPr>
-          <p:cNvPr id="6" name="Footer Placeholder 5"/>
-          <p:cNvSpPr>
-            <a:spLocks noGrp="1"/>
-          </p:cNvSpPr>
-          <p:nvPr>
-            <p:ph type="ftr" sz="quarter" idx="4"/>
-          </p:nvPr>
-        </p:nvSpPr>
-        <p:spPr>
-          <a:xfrm>
-            <a:off x="0" y="8685213"/>
-            <a:ext cx="2971800" cy="458787"/>
-          </a:xfrm>
-          <a:prstGeom prst="rect">
-            <a:avLst/>
-          </a:prstGeom>
-        </p:spPr>
-        <p:txBody>
-          <a:bodyPr vert="horz" lIns="91440" tIns="45720" rIns="91440" bIns="45720" rtlCol="0" anchor="b"/>
-          <a:lstStyle>
-            <a:lvl1pPr algn="l">
-              <a:defRPr sz="1200"/>
-            </a:lvl1pPr>
-          </a:lstStyle>
-          <a:p>
-            <a:endParaRPr lang="en-US"/>
-          </a:p>
-        </p:txBody>
-      </p:sp>
-      <p:sp>
-        <p:nvSpPr>
-          <p:cNvPr id="7" name="Slide Number Placeholder 6"/>
-          <p:cNvSpPr>
-            <a:spLocks noGrp="1"/>
-          </p:cNvSpPr>
-          <p:nvPr>
-            <p:ph type="sldNum" sz="quarter" idx="5"/>
-          </p:nvPr>
-        </p:nvSpPr>
-        <p:spPr>
-          <a:xfrm>
-            <a:off x="3884613" y="8685213"/>
-            <a:ext cx="2971800" cy="458787"/>
-          </a:xfrm>
-          <a:prstGeom prst="rect">
-            <a:avLst/>
-          </a:prstGeom>
-        </p:spPr>
-        <p:txBody>
-          <a:bodyPr vert="horz" lIns="91440" tIns="45720" rIns="91440" bIns="45720" rtlCol="0" anchor="b"/>
-          <a:lstStyle>
-            <a:lvl1pPr algn="r">
-              <a:defRPr sz="1200"/>
-            </a:lvl1pPr>
-          </a:lstStyle>
-          <a:p>
-            <a:fld id="{CE5E9CC1-C706-0F49-92D6-E571CC5EEA8F}" type="slidenum">
-              <a:rPr lang="en-US"/>
-              <a:t>‹#›</a:t>
-            </a:fld>
-            <a:endParaRPr lang="en-US"/>
-          </a:p>
-        </p:txBody>
-      </p:sp>
     </p:spTree>
     <p:extLst>
       <p:ext uri="{BB962C8B-B14F-4D97-AF65-F5344CB8AC3E}">
-        <p14:creationId xmlns:p14="http://schemas.microsoft.com/office/powerpoint/2010/main" val="1024086991"/>
+        <p14:creationId xmlns:p14="http://schemas.microsoft.com/office/powerpoint/2010/main" val="3471339931"/>
       </p:ext>
     </p:extLst>
   </p:cSld>
@@ -508,7 +289,6 @@
               <a:rPr lang="en-US" dirty="0"/>
               <a:t>Sono partita dalla domanda dell’azienda: in quali comuni conviene investire in prevenzione del rischio stradale. Ho usato i dati ISTAT sugli incidenti dal 2001 al 2024.</a:t>
             </a:r>
-            <a:endParaRPr lang="en-US" dirty="0"/>
           </a:p>
         </p:txBody>
       </p:sp>
@@ -596,7 +376,6 @@
               <a:rPr lang="en-US" dirty="0"/>
               <a:t>Il problema: i dati ISTAT non hanno popolazione né superficie, quindi li ho presi da SITUAS per calcolare i tassi. I comuni sono 7.896 e gli incidenti dal 2001 al 2024 sono circa 4,8 milioni. Il server ISTAT è lento e ha un limite di richieste, per questo il download è salvato in un file.</a:t>
             </a:r>
-            <a:endParaRPr lang="en-US" dirty="0"/>
           </a:p>
         </p:txBody>
       </p:sp>
@@ -684,7 +463,6 @@
               <a:rPr lang="en-US" dirty="0"/>
               <a:t>Il processo. Scarico gli incidenti dall’API ISTAT e faccio lo scraping di SITUAS. Poi pulizia: “NA” di Napoli letto come valore mancante e comuni a zero incidenti nel 2024. Unisco con il codice del comune, calcolo i tassi, faccio analisi, cluster e test, e infine la dashboard. Controllo: i totali 2024 coincidono con quelli ufficiali ISTAT-ACI.</a:t>
             </a:r>
-            <a:endParaRPr lang="en-US" dirty="0"/>
           </a:p>
         </p:txBody>
       </p:sp>
@@ -772,7 +550,6 @@
               <a:rPr lang="en-US" dirty="0"/>
               <a:t>Gli strumenti: Python per scaricare e pulire, Selenium e BeautifulSoup per lo scraping, scikit-learn, SciPy e statsmodels per l’analisi, matplotlib e seaborn per i grafici, Power BI per la dashboard, Git e GitHub per il versionamento.</a:t>
             </a:r>
-            <a:endParaRPr lang="en-US" dirty="0"/>
           </a:p>
         </p:txBody>
       </p:sp>
@@ -858,9 +635,8 @@
           <a:p>
             <a:r>
               <a:rPr lang="en-US" dirty="0"/>
-              <a:t>I risultati. Trend degli incidenti dal 2001 al 2024, quattro cluster con K-means, capoluoghi 4,04 contro 1,83 per 1.000 (t-test), Centro 2,21, Nord 2,04, Sud 1,42 (ANOVA). Le due liste sono la media dei tassi 2001-2024, come in Power BI. Limite: popolazione e superficie sono quelle del 2024 per tutti gli anni. Conclusione: Milano, Firenze e Bergamo sono nella top 10 di entrambe le misure e la cintura di Milano ha la concentrazione più alta.</a:t>
+              <a:t>I risultati. Trend degli incidenti dal 2001 al 2024, quattro cluster con K-means, Centro 2,21, Nord 2,04, Sud 1,42 (ANOVA). Le due liste sono la media dei tassi 2001-2024, come in Power BI. Limite: popolazione e superficie sono quelle del 2024 per tutti gli anni. Conclusione: Milano, Firenze e Bergamo sono nella top 10 di entrambe le misure e la cintura di Milano ha la concentrazione più alta.</a:t>
             </a:r>
-            <a:endParaRPr lang="en-US" dirty="0"/>
           </a:p>
         </p:txBody>
       </p:sp>
@@ -938,6 +714,7 @@
         <a:solidFill>
           <a:srgbClr val="FFFFFF"/>
         </a:solidFill>
+        <a:effectLst/>
       </p:bgPr>
     </p:bg>
     <p:spTree>
@@ -957,7 +734,9 @@
       <p:sp>
         <p:nvSpPr>
           <p:cNvPr id="2" name="Title Placeholder 1"/>
-          <p:cNvSpPr/>
+          <p:cNvSpPr>
+            <a:spLocks noGrp="1"/>
+          </p:cNvSpPr>
           <p:nvPr>
             <p:ph type="title"/>
           </p:nvPr>
@@ -976,7 +755,7 @@
         <p:txBody>
           <a:bodyPr wrap="square" lIns="0" tIns="0" rIns="0" bIns="0" rtlCol="0" anchor="t"/>
           <a:lstStyle>
-            <a:lvl1pPr algn="l" indent="0" marL="0">
+            <a:lvl1pPr marL="0" indent="0" algn="l">
               <a:lnSpc>
                 <a:spcPct val="115000"/>
               </a:lnSpc>
@@ -992,7 +771,7 @@
             </a:lvl1pPr>
           </a:lstStyle>
           <a:p>
-            <a:pPr algn="l" indent="0" marL="0">
+            <a:pPr marL="0" indent="0" algn="l">
               <a:lnSpc>
                 <a:spcPct val="115000"/>
               </a:lnSpc>
@@ -1005,9 +784,11 @@
       <p:sp>
         <p:nvSpPr>
           <p:cNvPr id="3" name="Text Placeholder 2"/>
-          <p:cNvSpPr/>
+          <p:cNvSpPr>
+            <a:spLocks noGrp="1"/>
+          </p:cNvSpPr>
           <p:nvPr>
-            <p:ph idx="101" type="body"/>
+            <p:ph type="body" idx="101"/>
           </p:nvPr>
         </p:nvSpPr>
         <p:spPr>
@@ -1024,7 +805,7 @@
         <p:txBody>
           <a:bodyPr wrap="square" lIns="0" tIns="0" rIns="0" bIns="0" rtlCol="0" anchor="t"/>
           <a:lstStyle>
-            <a:lvl1pPr algn="l" indent="0" marL="0">
+            <a:lvl1pPr marL="0" indent="0" algn="l">
               <a:lnSpc>
                 <a:spcPct val="140000"/>
               </a:lnSpc>
@@ -1040,7 +821,7 @@
             </a:lvl1pPr>
           </a:lstStyle>
           <a:p>
-            <a:pPr algn="l" indent="0" marL="0">
+            <a:pPr marL="0" indent="0" algn="l">
               <a:lnSpc>
                 <a:spcPct val="140000"/>
               </a:lnSpc>
@@ -1066,6 +847,7 @@
         <a:solidFill>
           <a:srgbClr val="FFFFFF"/>
         </a:solidFill>
+        <a:effectLst/>
       </p:bgPr>
     </p:bg>
     <p:spTree>
@@ -1085,7 +867,9 @@
       <p:sp>
         <p:nvSpPr>
           <p:cNvPr id="2" name="Title Placeholder 1"/>
-          <p:cNvSpPr/>
+          <p:cNvSpPr>
+            <a:spLocks noGrp="1"/>
+          </p:cNvSpPr>
           <p:nvPr>
             <p:ph type="title"/>
           </p:nvPr>
@@ -1104,7 +888,7 @@
         <p:txBody>
           <a:bodyPr wrap="square" lIns="0" tIns="0" rIns="0" bIns="0" rtlCol="0" anchor="t"/>
           <a:lstStyle>
-            <a:lvl1pPr algn="l" indent="0" marL="0">
+            <a:lvl1pPr marL="0" indent="0" algn="l">
               <a:lnSpc>
                 <a:spcPct val="115000"/>
               </a:lnSpc>
@@ -1120,7 +904,7 @@
             </a:lvl1pPr>
           </a:lstStyle>
           <a:p>
-            <a:pPr algn="l" indent="0" marL="0">
+            <a:pPr marL="0" indent="0" algn="l">
               <a:lnSpc>
                 <a:spcPct val="115000"/>
               </a:lnSpc>
@@ -1133,9 +917,11 @@
       <p:sp>
         <p:nvSpPr>
           <p:cNvPr id="3" name="Text Placeholder 2"/>
-          <p:cNvSpPr/>
+          <p:cNvSpPr>
+            <a:spLocks noGrp="1"/>
+          </p:cNvSpPr>
           <p:nvPr>
-            <p:ph idx="101" type="body"/>
+            <p:ph type="body" idx="101"/>
           </p:nvPr>
         </p:nvSpPr>
         <p:spPr>
@@ -1152,7 +938,7 @@
         <p:txBody>
           <a:bodyPr wrap="square" lIns="0" tIns="0" rIns="0" bIns="0" rtlCol="0" anchor="t"/>
           <a:lstStyle>
-            <a:lvl1pPr algn="l" indent="0" marL="0">
+            <a:lvl1pPr marL="0" indent="0" algn="l">
               <a:lnSpc>
                 <a:spcPct val="140000"/>
               </a:lnSpc>
@@ -1168,7 +954,7 @@
             </a:lvl1pPr>
           </a:lstStyle>
           <a:p>
-            <a:pPr algn="l" indent="0" marL="0">
+            <a:pPr marL="0" indent="0" algn="l">
               <a:lnSpc>
                 <a:spcPct val="140000"/>
               </a:lnSpc>
@@ -1447,6 +1233,7 @@
         <a:solidFill>
           <a:srgbClr val="FFFFFF"/>
         </a:solidFill>
+        <a:effectLst/>
       </p:bgPr>
     </p:bg>
     <p:spTree>
@@ -1466,7 +1253,9 @@
       <p:sp>
         <p:nvSpPr>
           <p:cNvPr id="2" name="Text 0"/>
-          <p:cNvSpPr/>
+          <p:cNvSpPr>
+            <a:spLocks noGrp="1"/>
+          </p:cNvSpPr>
           <p:nvPr>
             <p:ph type="title"/>
           </p:nvPr>
@@ -1488,7 +1277,7 @@
           </a:bodyPr>
           <a:lstStyle/>
           <a:p>
-            <a:pPr algn="l" indent="0" marL="0">
+            <a:pPr marL="0" indent="0" algn="l">
               <a:lnSpc>
                 <a:spcPts val="5280"/>
               </a:lnSpc>
@@ -1532,7 +1321,7 @@
           </a:bodyPr>
           <a:lstStyle/>
           <a:p>
-            <a:pPr algn="l" indent="0" marL="0">
+            <a:pPr marL="0" indent="0" algn="l">
               <a:lnSpc>
                 <a:spcPts val="2970"/>
               </a:lnSpc>
@@ -1576,7 +1365,7 @@
           </a:bodyPr>
           <a:lstStyle/>
           <a:p>
-            <a:pPr algn="l" indent="0" marL="0">
+            <a:pPr marL="0" indent="0" algn="l">
               <a:lnSpc>
                 <a:spcPts val="2100"/>
               </a:lnSpc>
@@ -1613,6 +1402,7 @@
         <a:solidFill>
           <a:srgbClr val="FFFFFF"/>
         </a:solidFill>
+        <a:effectLst/>
       </p:bgPr>
     </p:bg>
     <p:spTree>
@@ -1632,7 +1422,9 @@
       <p:sp>
         <p:nvSpPr>
           <p:cNvPr id="2" name="Text 0"/>
-          <p:cNvSpPr/>
+          <p:cNvSpPr>
+            <a:spLocks noGrp="1"/>
+          </p:cNvSpPr>
           <p:nvPr>
             <p:ph type="title"/>
           </p:nvPr>
@@ -1654,7 +1446,7 @@
           </a:bodyPr>
           <a:lstStyle/>
           <a:p>
-            <a:pPr algn="l" indent="0" marL="0">
+            <a:pPr marL="0" indent="0" algn="l">
               <a:lnSpc>
                 <a:spcPts val="3740"/>
               </a:lnSpc>
@@ -1698,7 +1490,7 @@
           </a:bodyPr>
           <a:lstStyle/>
           <a:p>
-            <a:pPr algn="l" indent="0" marL="0">
+            <a:pPr marL="0" indent="0" algn="l">
               <a:lnSpc>
                 <a:spcPts val="2755"/>
               </a:lnSpc>
@@ -1742,7 +1534,7 @@
           </a:bodyPr>
           <a:lstStyle/>
           <a:p>
-            <a:pPr algn="l" marL="197866" indent="-197866">
+            <a:pPr marL="197866" indent="-197866" algn="l">
               <a:lnSpc>
                 <a:spcPts val="3060"/>
               </a:lnSpc>
@@ -1763,7 +1555,7 @@
             <a:endParaRPr lang="en-US" sz="1800" dirty="0"/>
           </a:p>
           <a:p>
-            <a:pPr algn="l" marL="197866" indent="-197866">
+            <a:pPr marL="197866" indent="-197866" algn="l">
               <a:lnSpc>
                 <a:spcPts val="3060"/>
               </a:lnSpc>
@@ -1784,7 +1576,7 @@
             <a:endParaRPr lang="en-US" sz="1800" dirty="0"/>
           </a:p>
           <a:p>
-            <a:pPr algn="l" marL="197866" indent="-197866">
+            <a:pPr marL="197866" indent="-197866" algn="l">
               <a:lnSpc>
                 <a:spcPts val="3060"/>
               </a:lnSpc>
@@ -1805,7 +1597,7 @@
             <a:endParaRPr lang="en-US" sz="1800" dirty="0"/>
           </a:p>
           <a:p>
-            <a:pPr algn="l" marL="197866" indent="-197866">
+            <a:pPr marL="197866" indent="-197866" algn="l">
               <a:lnSpc>
                 <a:spcPts val="3060"/>
               </a:lnSpc>
@@ -1850,7 +1642,7 @@
           </a:bodyPr>
           <a:lstStyle/>
           <a:p>
-            <a:pPr algn="l" indent="0" marL="0">
+            <a:pPr marL="0" indent="0" algn="l">
               <a:lnSpc>
                 <a:spcPts val="1680"/>
               </a:lnSpc>
@@ -1887,6 +1679,7 @@
         <a:solidFill>
           <a:srgbClr val="FFFFFF"/>
         </a:solidFill>
+        <a:effectLst/>
       </p:bgPr>
     </p:bg>
     <p:spTree>
@@ -1906,7 +1699,9 @@
       <p:sp>
         <p:nvSpPr>
           <p:cNvPr id="2" name="Text 0"/>
-          <p:cNvSpPr/>
+          <p:cNvSpPr>
+            <a:spLocks noGrp="1"/>
+          </p:cNvSpPr>
           <p:nvPr>
             <p:ph type="title"/>
           </p:nvPr>
@@ -1928,7 +1723,7 @@
           </a:bodyPr>
           <a:lstStyle/>
           <a:p>
-            <a:pPr algn="l" indent="0" marL="0">
+            <a:pPr marL="0" indent="0" algn="l">
               <a:lnSpc>
                 <a:spcPts val="3740"/>
               </a:lnSpc>
@@ -1972,13 +1767,13 @@
           </a:bodyPr>
           <a:lstStyle/>
           <a:p>
-            <a:pPr algn="l" marL="225346" indent="-225346">
+            <a:pPr marL="225346" indent="-225346" algn="l">
               <a:lnSpc>
                 <a:spcPts val="2790"/>
               </a:lnSpc>
               <a:buSzPct val="100000"/>
               <a:buFontTx/>
-              <a:buAutoNum type="arabicPeriod" startAt="1"/>
+              <a:buAutoNum type="arabicPeriod"/>
             </a:pPr>
             <a:r>
               <a:rPr lang="en-US" sz="1800" b="1" dirty="0">
@@ -2005,13 +1800,13 @@
             <a:endParaRPr lang="en-US" sz="1800" dirty="0"/>
           </a:p>
           <a:p>
-            <a:pPr algn="l" marL="225346" indent="-225346">
+            <a:pPr marL="225346" indent="-225346" algn="l">
               <a:lnSpc>
                 <a:spcPts val="2790"/>
               </a:lnSpc>
               <a:buSzPct val="100000"/>
               <a:buFontTx/>
-              <a:buAutoNum type="arabicPeriod" startAt="1"/>
+              <a:buAutoNum type="arabicPeriod"/>
             </a:pPr>
             <a:r>
               <a:rPr lang="en-US" sz="1800" b="1" dirty="0">
@@ -2038,13 +1833,13 @@
             <a:endParaRPr lang="en-US" sz="1800" dirty="0"/>
           </a:p>
           <a:p>
-            <a:pPr algn="l" marL="225346" indent="-225346">
+            <a:pPr marL="225346" indent="-225346" algn="l">
               <a:lnSpc>
                 <a:spcPts val="2790"/>
               </a:lnSpc>
               <a:buSzPct val="100000"/>
               <a:buFontTx/>
-              <a:buAutoNum type="arabicPeriod" startAt="1"/>
+              <a:buAutoNum type="arabicPeriod"/>
             </a:pPr>
             <a:r>
               <a:rPr lang="en-US" sz="1800" b="1" dirty="0">
@@ -2071,13 +1866,13 @@
             <a:endParaRPr lang="en-US" sz="1800" dirty="0"/>
           </a:p>
           <a:p>
-            <a:pPr algn="l" marL="225346" indent="-225346">
+            <a:pPr marL="225346" indent="-225346" algn="l">
               <a:lnSpc>
                 <a:spcPts val="2790"/>
               </a:lnSpc>
               <a:buSzPct val="100000"/>
               <a:buFontTx/>
-              <a:buAutoNum type="arabicPeriod" startAt="1"/>
+              <a:buAutoNum type="arabicPeriod"/>
             </a:pPr>
             <a:r>
               <a:rPr lang="en-US" sz="1800" b="1" dirty="0">
@@ -2099,18 +1894,18 @@
                 <a:ea typeface="Calibri" pitchFamily="34" charset="-122"/>
                 <a:cs typeface="Calibri" pitchFamily="34" charset="-120"/>
               </a:rPr>
-              <a:t> Exploratory charts, K-means clusters, a regression, a t-test and an ANOVA.</a:t>
+              <a:t> Exploratory charts, K-means clusters, a regression, and ANOVA.</a:t>
             </a:r>
             <a:endParaRPr lang="en-US" sz="1800" dirty="0"/>
           </a:p>
           <a:p>
-            <a:pPr algn="l" marL="225346" indent="-225346">
+            <a:pPr marL="225346" indent="-225346" algn="l">
               <a:lnSpc>
                 <a:spcPts val="2790"/>
               </a:lnSpc>
               <a:buSzPct val="100000"/>
               <a:buFontTx/>
-              <a:buAutoNum type="arabicPeriod" startAt="1"/>
+              <a:buAutoNum type="arabicPeriod"/>
             </a:pPr>
             <a:r>
               <a:rPr lang="en-US" sz="1800" b="1" dirty="0">
@@ -2161,7 +1956,7 @@
           </a:bodyPr>
           <a:lstStyle/>
           <a:p>
-            <a:pPr algn="l" indent="0" marL="0">
+            <a:pPr marL="0" indent="0" algn="l">
               <a:lnSpc>
                 <a:spcPts val="2240"/>
               </a:lnSpc>
@@ -2205,7 +2000,7 @@
           </a:bodyPr>
           <a:lstStyle/>
           <a:p>
-            <a:pPr algn="l" indent="0" marL="0">
+            <a:pPr marL="0" indent="0" algn="l">
               <a:lnSpc>
                 <a:spcPts val="1680"/>
               </a:lnSpc>
@@ -2242,6 +2037,7 @@
         <a:solidFill>
           <a:srgbClr val="FFFFFF"/>
         </a:solidFill>
+        <a:effectLst/>
       </p:bgPr>
     </p:bg>
     <p:spTree>
@@ -2261,7 +2057,9 @@
       <p:sp>
         <p:nvSpPr>
           <p:cNvPr id="2" name="Text 0"/>
-          <p:cNvSpPr/>
+          <p:cNvSpPr>
+            <a:spLocks noGrp="1"/>
+          </p:cNvSpPr>
           <p:nvPr>
             <p:ph type="title"/>
           </p:nvPr>
@@ -2283,7 +2081,7 @@
           </a:bodyPr>
           <a:lstStyle/>
           <a:p>
-            <a:pPr algn="l" indent="0" marL="0">
+            <a:pPr marL="0" indent="0" algn="l">
               <a:lnSpc>
                 <a:spcPts val="3740"/>
               </a:lnSpc>
@@ -2313,7 +2111,7 @@
           <p:nvPr>
             <p:extLst>
               <p:ext uri="{D42A27DB-BD31-4B8C-83A1-F6EECF244321}">
-                <p14:modId xmlns:p14="http://schemas.microsoft.com/office/powerpoint/2010/main" val="1579011935"/>
+                <p14:modId xmlns:p14="http://schemas.microsoft.com/office/powerpoint/2010/main" val="2230020468"/>
               </p:ext>
             </p:extLst>
           </p:nvPr>
@@ -2327,8 +2125,20 @@
             <a:tbl>
               <a:tblPr/>
               <a:tblGrid>
-                <a:gridCol w="5074920"/>
-                <a:gridCol w="5074920"/>
+                <a:gridCol w="5074920">
+                  <a:extLst>
+                    <a:ext uri="{9D8B030D-6E8A-4147-A177-3AD203B41FA5}">
+                      <a16:colId xmlns:a16="http://schemas.microsoft.com/office/drawing/2014/main" val="20000"/>
+                    </a:ext>
+                  </a:extLst>
+                </a:gridCol>
+                <a:gridCol w="5074920">
+                  <a:extLst>
+                    <a:ext uri="{9D8B030D-6E8A-4147-A177-3AD203B41FA5}">
+                      <a16:colId xmlns:a16="http://schemas.microsoft.com/office/drawing/2014/main" val="20001"/>
+                    </a:ext>
+                  </a:extLst>
+                </a:gridCol>
               </a:tblGrid>
               <a:tr h="904240">
                 <a:tc>
@@ -2336,7 +2146,7 @@
                     <a:bodyPr/>
                     <a:lstStyle/>
                     <a:p>
-                      <a:pPr indent="0" marL="0">
+                      <a:pPr marL="0" indent="0">
                         <a:lnSpc>
                           <a:spcPts val="2520"/>
                         </a:lnSpc>
@@ -2360,7 +2170,7 @@
                       </a:endParaRPr>
                     </a:p>
                   </a:txBody>
-                  <a:tcPr marL="0" marR="0" marT="127000" marB="127000" anchor="t">
+                  <a:tcPr marL="0" marR="0" marT="127000" marB="127000">
                     <a:lnL w="12700" cap="flat" cmpd="sng" algn="ctr">
                       <a:solidFill>
                         <a:srgbClr val="CBCBCB"/>
@@ -2404,7 +2214,7 @@
                     <a:bodyPr/>
                     <a:lstStyle/>
                     <a:p>
-                      <a:pPr indent="0" marL="0">
+                      <a:pPr marL="0" indent="0">
                         <a:lnSpc>
                           <a:spcPts val="2520"/>
                         </a:lnSpc>
@@ -2428,7 +2238,7 @@
                       </a:endParaRPr>
                     </a:p>
                   </a:txBody>
-                  <a:tcPr marL="0" marR="0" marT="127000" marB="127000" anchor="t">
+                  <a:tcPr marL="0" marR="0" marT="127000" marB="127000">
                     <a:lnL w="12700" cap="flat" cmpd="sng" algn="ctr">
                       <a:solidFill>
                         <a:srgbClr val="CBCBCB"/>
@@ -2467,6 +2277,11 @@
                     </a:lnB>
                   </a:tcPr>
                 </a:tc>
+                <a:extLst>
+                  <a:ext uri="{0D108BD9-81ED-4DB2-BD59-A6C34878D82A}">
+                    <a16:rowId xmlns:a16="http://schemas.microsoft.com/office/drawing/2014/main" val="10000"/>
+                  </a:ext>
+                </a:extLst>
               </a:tr>
               <a:tr h="584200">
                 <a:tc>
@@ -2474,7 +2289,7 @@
                     <a:bodyPr/>
                     <a:lstStyle/>
                     <a:p>
-                      <a:pPr indent="0" marL="0">
+                      <a:pPr marL="0" indent="0">
                         <a:lnSpc>
                           <a:spcPts val="2520"/>
                         </a:lnSpc>
@@ -2498,7 +2313,7 @@
                       </a:endParaRPr>
                     </a:p>
                   </a:txBody>
-                  <a:tcPr marL="0" marR="0" marT="127000" marB="127000" anchor="t">
+                  <a:tcPr marL="0" marR="0" marT="127000" marB="127000">
                     <a:lnL w="12700" cap="flat" cmpd="sng" algn="ctr">
                       <a:solidFill>
                         <a:srgbClr val="CBCBCB"/>
@@ -2542,7 +2357,7 @@
                     <a:bodyPr/>
                     <a:lstStyle/>
                     <a:p>
-                      <a:pPr indent="0" marL="0">
+                      <a:pPr marL="0" indent="0">
                         <a:lnSpc>
                           <a:spcPts val="2520"/>
                         </a:lnSpc>
@@ -2566,7 +2381,7 @@
                       </a:endParaRPr>
                     </a:p>
                   </a:txBody>
-                  <a:tcPr marL="0" marR="0" marT="127000" marB="127000" anchor="t">
+                  <a:tcPr marL="0" marR="0" marT="127000" marB="127000">
                     <a:lnL w="12700" cap="flat" cmpd="sng" algn="ctr">
                       <a:solidFill>
                         <a:srgbClr val="CBCBCB"/>
@@ -2605,6 +2420,11 @@
                     </a:lnB>
                   </a:tcPr>
                 </a:tc>
+                <a:extLst>
+                  <a:ext uri="{0D108BD9-81ED-4DB2-BD59-A6C34878D82A}">
+                    <a16:rowId xmlns:a16="http://schemas.microsoft.com/office/drawing/2014/main" val="10001"/>
+                  </a:ext>
+                </a:extLst>
               </a:tr>
               <a:tr h="584200">
                 <a:tc>
@@ -2612,7 +2432,7 @@
                     <a:bodyPr/>
                     <a:lstStyle/>
                     <a:p>
-                      <a:pPr indent="0" marL="0">
+                      <a:pPr marL="0" indent="0">
                         <a:lnSpc>
                           <a:spcPts val="2520"/>
                         </a:lnSpc>
@@ -2636,7 +2456,7 @@
                       </a:endParaRPr>
                     </a:p>
                   </a:txBody>
-                  <a:tcPr marL="0" marR="0" marT="127000" marB="127000" anchor="t">
+                  <a:tcPr marL="0" marR="0" marT="127000" marB="127000">
                     <a:lnL w="12700" cap="flat" cmpd="sng" algn="ctr">
                       <a:solidFill>
                         <a:srgbClr val="CBCBCB"/>
@@ -2680,7 +2500,7 @@
                     <a:bodyPr/>
                     <a:lstStyle/>
                     <a:p>
-                      <a:pPr indent="0" marL="0">
+                      <a:pPr marL="0" indent="0">
                         <a:lnSpc>
                           <a:spcPts val="2520"/>
                         </a:lnSpc>
@@ -2704,7 +2524,7 @@
                       </a:endParaRPr>
                     </a:p>
                   </a:txBody>
-                  <a:tcPr marL="0" marR="0" marT="127000" marB="127000" anchor="t">
+                  <a:tcPr marL="0" marR="0" marT="127000" marB="127000">
                     <a:lnL w="12700" cap="flat" cmpd="sng" algn="ctr">
                       <a:solidFill>
                         <a:srgbClr val="CBCBCB"/>
@@ -2743,6 +2563,11 @@
                     </a:lnB>
                   </a:tcPr>
                 </a:tc>
+                <a:extLst>
+                  <a:ext uri="{0D108BD9-81ED-4DB2-BD59-A6C34878D82A}">
+                    <a16:rowId xmlns:a16="http://schemas.microsoft.com/office/drawing/2014/main" val="10002"/>
+                  </a:ext>
+                </a:extLst>
               </a:tr>
               <a:tr h="584200">
                 <a:tc>
@@ -2750,7 +2575,7 @@
                     <a:bodyPr/>
                     <a:lstStyle/>
                     <a:p>
-                      <a:pPr indent="0" marL="0">
+                      <a:pPr marL="0" indent="0">
                         <a:lnSpc>
                           <a:spcPts val="2520"/>
                         </a:lnSpc>
@@ -2774,7 +2599,7 @@
                       </a:endParaRPr>
                     </a:p>
                   </a:txBody>
-                  <a:tcPr marL="0" marR="0" marT="127000" marB="127000" anchor="t">
+                  <a:tcPr marL="0" marR="0" marT="127000" marB="127000">
                     <a:lnL w="12700" cap="flat" cmpd="sng" algn="ctr">
                       <a:solidFill>
                         <a:srgbClr val="CBCBCB"/>
@@ -2818,7 +2643,7 @@
                     <a:bodyPr/>
                     <a:lstStyle/>
                     <a:p>
-                      <a:pPr indent="0" marL="0">
+                      <a:pPr marL="0" indent="0">
                         <a:lnSpc>
                           <a:spcPts val="2520"/>
                         </a:lnSpc>
@@ -2833,7 +2658,7 @@
                           <a:ea typeface="Calibri" pitchFamily="34" charset="-122"/>
                           <a:cs typeface="Calibri" pitchFamily="34" charset="-120"/>
                         </a:rPr>
-                        <a:t>K-means, regression, t-test, ANOVA</a:t>
+                        <a:t>K-means, regression, ANOVA</a:t>
                       </a:r>
                       <a:endParaRPr lang="en-US" sz="1800" dirty="0">
                         <a:latin typeface="Calibri" charset="0"/>
@@ -2842,7 +2667,7 @@
                       </a:endParaRPr>
                     </a:p>
                   </a:txBody>
-                  <a:tcPr marL="0" marR="0" marT="127000" marB="127000" anchor="t">
+                  <a:tcPr marL="0" marR="0" marT="127000" marB="127000">
                     <a:lnL w="12700" cap="flat" cmpd="sng" algn="ctr">
                       <a:solidFill>
                         <a:srgbClr val="CBCBCB"/>
@@ -2881,6 +2706,11 @@
                     </a:lnB>
                   </a:tcPr>
                 </a:tc>
+                <a:extLst>
+                  <a:ext uri="{0D108BD9-81ED-4DB2-BD59-A6C34878D82A}">
+                    <a16:rowId xmlns:a16="http://schemas.microsoft.com/office/drawing/2014/main" val="10003"/>
+                  </a:ext>
+                </a:extLst>
               </a:tr>
               <a:tr h="584200">
                 <a:tc>
@@ -2888,7 +2718,7 @@
                     <a:bodyPr/>
                     <a:lstStyle/>
                     <a:p>
-                      <a:pPr indent="0" marL="0">
+                      <a:pPr marL="0" indent="0">
                         <a:lnSpc>
                           <a:spcPts val="2520"/>
                         </a:lnSpc>
@@ -2912,7 +2742,7 @@
                       </a:endParaRPr>
                     </a:p>
                   </a:txBody>
-                  <a:tcPr marL="0" marR="0" marT="127000" marB="127000" anchor="t">
+                  <a:tcPr marL="0" marR="0" marT="127000" marB="127000">
                     <a:lnL w="12700" cap="flat" cmpd="sng" algn="ctr">
                       <a:solidFill>
                         <a:srgbClr val="CBCBCB"/>
@@ -2956,7 +2786,7 @@
                     <a:bodyPr/>
                     <a:lstStyle/>
                     <a:p>
-                      <a:pPr indent="0" marL="0">
+                      <a:pPr marL="0" indent="0">
                         <a:lnSpc>
                           <a:spcPts val="2520"/>
                         </a:lnSpc>
@@ -2980,7 +2810,7 @@
                       </a:endParaRPr>
                     </a:p>
                   </a:txBody>
-                  <a:tcPr marL="0" marR="0" marT="127000" marB="127000" anchor="t">
+                  <a:tcPr marL="0" marR="0" marT="127000" marB="127000">
                     <a:lnL w="12700" cap="flat" cmpd="sng" algn="ctr">
                       <a:solidFill>
                         <a:srgbClr val="CBCBCB"/>
@@ -3019,6 +2849,11 @@
                     </a:lnB>
                   </a:tcPr>
                 </a:tc>
+                <a:extLst>
+                  <a:ext uri="{0D108BD9-81ED-4DB2-BD59-A6C34878D82A}">
+                    <a16:rowId xmlns:a16="http://schemas.microsoft.com/office/drawing/2014/main" val="10004"/>
+                  </a:ext>
+                </a:extLst>
               </a:tr>
               <a:tr h="584200">
                 <a:tc>
@@ -3026,7 +2861,7 @@
                     <a:bodyPr/>
                     <a:lstStyle/>
                     <a:p>
-                      <a:pPr indent="0" marL="0">
+                      <a:pPr marL="0" indent="0">
                         <a:lnSpc>
                           <a:spcPts val="2520"/>
                         </a:lnSpc>
@@ -3050,7 +2885,7 @@
                       </a:endParaRPr>
                     </a:p>
                   </a:txBody>
-                  <a:tcPr marL="0" marR="0" marT="127000" marB="127000" anchor="t">
+                  <a:tcPr marL="0" marR="0" marT="127000" marB="127000">
                     <a:lnL w="12700" cap="flat" cmpd="sng" algn="ctr">
                       <a:solidFill>
                         <a:srgbClr val="CBCBCB"/>
@@ -3094,7 +2929,7 @@
                     <a:bodyPr/>
                     <a:lstStyle/>
                     <a:p>
-                      <a:pPr indent="0" marL="0">
+                      <a:pPr marL="0" indent="0">
                         <a:lnSpc>
                           <a:spcPts val="2520"/>
                         </a:lnSpc>
@@ -3118,7 +2953,7 @@
                       </a:endParaRPr>
                     </a:p>
                   </a:txBody>
-                  <a:tcPr marL="0" marR="0" marT="127000" marB="127000" anchor="t">
+                  <a:tcPr marL="0" marR="0" marT="127000" marB="127000">
                     <a:lnL w="12700" cap="flat" cmpd="sng" algn="ctr">
                       <a:solidFill>
                         <a:srgbClr val="CBCBCB"/>
@@ -3157,6 +2992,11 @@
                     </a:lnB>
                   </a:tcPr>
                 </a:tc>
+                <a:extLst>
+                  <a:ext uri="{0D108BD9-81ED-4DB2-BD59-A6C34878D82A}">
+                    <a16:rowId xmlns:a16="http://schemas.microsoft.com/office/drawing/2014/main" val="10005"/>
+                  </a:ext>
+                </a:extLst>
               </a:tr>
             </a:tbl>
           </a:graphicData>
@@ -3185,7 +3025,7 @@
           </a:bodyPr>
           <a:lstStyle/>
           <a:p>
-            <a:pPr algn="l" indent="0" marL="0">
+            <a:pPr marL="0" indent="0" algn="l">
               <a:lnSpc>
                 <a:spcPts val="1680"/>
               </a:lnSpc>
@@ -3222,6 +3062,7 @@
         <a:solidFill>
           <a:srgbClr val="FFFFFF"/>
         </a:solidFill>
+        <a:effectLst/>
       </p:bgPr>
     </p:bg>
     <p:spTree>
@@ -3261,7 +3102,7 @@
           </a:bodyPr>
           <a:lstStyle/>
           <a:p>
-            <a:pPr algn="l" indent="0" marL="0">
+            <a:pPr marL="0" indent="0" algn="l">
               <a:lnSpc>
                 <a:spcPts val="1680"/>
               </a:lnSpc>
@@ -3285,7 +3126,9 @@
       <p:sp>
         <p:nvSpPr>
           <p:cNvPr id="3" name="Text 1"/>
-          <p:cNvSpPr/>
+          <p:cNvSpPr>
+            <a:spLocks noGrp="1"/>
+          </p:cNvSpPr>
           <p:nvPr>
             <p:ph type="title"/>
           </p:nvPr>
@@ -3307,7 +3150,7 @@
           </a:bodyPr>
           <a:lstStyle/>
           <a:p>
-            <a:pPr algn="l" indent="0" marL="0">
+            <a:pPr marL="0" indent="0" algn="l">
               <a:lnSpc>
                 <a:spcPts val="3740"/>
               </a:lnSpc>
@@ -3336,8 +3179,8 @@
         </p:nvSpPr>
         <p:spPr>
           <a:xfrm>
-            <a:off x="966470" y="1466850"/>
-            <a:ext cx="4493260" cy="3073400"/>
+            <a:off x="977900" y="2032000"/>
+            <a:ext cx="4493260" cy="1826956"/>
           </a:xfrm>
           <a:prstGeom prst="rect">
             <a:avLst/>
@@ -3351,7 +3194,7 @@
           </a:bodyPr>
           <a:lstStyle/>
           <a:p>
-            <a:pPr algn="l" marL="176530" indent="-176530">
+            <a:pPr marL="176530" indent="-176530" algn="l">
               <a:lnSpc>
                 <a:spcPts val="2250"/>
               </a:lnSpc>
@@ -3372,7 +3215,7 @@
             <a:endParaRPr lang="en-US" sz="1500" dirty="0"/>
           </a:p>
           <a:p>
-            <a:pPr algn="l" marL="176530" indent="-176530">
+            <a:pPr marL="176530" indent="-176530" algn="l">
               <a:lnSpc>
                 <a:spcPts val="2250"/>
               </a:lnSpc>
@@ -3389,27 +3232,6 @@
                 <a:cs typeface="Calibri" pitchFamily="34" charset="-120"/>
               </a:rPr>
               <a:t>K-means gives 4 groups of municipalities: 4,965 low risk, 2,666 medium, 164 dense urban areas and 101 with the highest rate per inhabitant.</a:t>
-            </a:r>
-            <a:endParaRPr lang="en-US" sz="1500" dirty="0"/>
-          </a:p>
-          <a:p>
-            <a:pPr algn="l" marL="176530" indent="-176530">
-              <a:lnSpc>
-                <a:spcPts val="2250"/>
-              </a:lnSpc>
-              <a:buSzPct val="100000"/>
-              <a:buChar char="•"/>
-            </a:pPr>
-            <a:r>
-              <a:rPr lang="en-US" sz="1500" dirty="0">
-                <a:solidFill>
-                  <a:srgbClr val="222222"/>
-                </a:solidFill>
-                <a:latin typeface="Calibri" pitchFamily="34" charset="0"/>
-                <a:ea typeface="Calibri" pitchFamily="34" charset="-122"/>
-                <a:cs typeface="Calibri" pitchFamily="34" charset="-120"/>
-              </a:rPr>
-              <a:t>Provincial capitals have more than twice the rate of the other municipalities (4.0 against 1.8 per 1,000). By macro-area the Centre is highest and the South lowest.</a:t>
             </a:r>
             <a:endParaRPr lang="en-US" sz="1500" dirty="0"/>
           </a:p>
@@ -3438,7 +3260,7 @@
           </a:bodyPr>
           <a:lstStyle/>
           <a:p>
-            <a:pPr algn="l" indent="0" marL="0">
+            <a:pPr marL="0" indent="0" algn="l">
               <a:lnSpc>
                 <a:spcPts val="1960"/>
               </a:lnSpc>
@@ -3504,8 +3326,20 @@
             <a:tbl>
               <a:tblPr/>
               <a:tblGrid>
-                <a:gridCol w="1264920"/>
-                <a:gridCol w="1264920"/>
+                <a:gridCol w="1264920">
+                  <a:extLst>
+                    <a:ext uri="{9D8B030D-6E8A-4147-A177-3AD203B41FA5}">
+                      <a16:colId xmlns:a16="http://schemas.microsoft.com/office/drawing/2014/main" val="20000"/>
+                    </a:ext>
+                  </a:extLst>
+                </a:gridCol>
+                <a:gridCol w="1264920">
+                  <a:extLst>
+                    <a:ext uri="{9D8B030D-6E8A-4147-A177-3AD203B41FA5}">
+                      <a16:colId xmlns:a16="http://schemas.microsoft.com/office/drawing/2014/main" val="20001"/>
+                    </a:ext>
+                  </a:extLst>
+                </a:gridCol>
               </a:tblGrid>
               <a:tr h="386080">
                 <a:tc>
@@ -3513,7 +3347,7 @@
                     <a:bodyPr/>
                     <a:lstStyle/>
                     <a:p>
-                      <a:pPr indent="0" marL="0">
+                      <a:pPr marL="0" indent="0">
                         <a:lnSpc>
                           <a:spcPts val="1960"/>
                         </a:lnSpc>
@@ -3537,7 +3371,7 @@
                       </a:endParaRPr>
                     </a:p>
                   </a:txBody>
-                  <a:tcPr marL="0" marR="0" marT="63500" marB="63500" anchor="t">
+                  <a:tcPr marL="0" marR="0" marT="63500" marB="63500">
                     <a:lnL w="12700" cap="flat" cmpd="sng" algn="ctr">
                       <a:solidFill>
                         <a:srgbClr val="CBCBCB"/>
@@ -3581,7 +3415,7 @@
                     <a:bodyPr/>
                     <a:lstStyle/>
                     <a:p>
-                      <a:pPr algn="r" indent="0" marL="0">
+                      <a:pPr marL="0" indent="0" algn="r">
                         <a:lnSpc>
                           <a:spcPts val="1960"/>
                         </a:lnSpc>
@@ -3605,7 +3439,7 @@
                       </a:endParaRPr>
                     </a:p>
                   </a:txBody>
-                  <a:tcPr marL="0" marR="0" marT="63500" marB="63500" anchor="t">
+                  <a:tcPr marL="0" marR="0" marT="63500" marB="63500">
                     <a:lnL w="12700" cap="flat" cmpd="sng" algn="ctr">
                       <a:solidFill>
                         <a:srgbClr val="CBCBCB"/>
@@ -3644,6 +3478,11 @@
                     </a:lnB>
                   </a:tcPr>
                 </a:tc>
+                <a:extLst>
+                  <a:ext uri="{0D108BD9-81ED-4DB2-BD59-A6C34878D82A}">
+                    <a16:rowId xmlns:a16="http://schemas.microsoft.com/office/drawing/2014/main" val="10000"/>
+                  </a:ext>
+                </a:extLst>
               </a:tr>
               <a:tr h="635000">
                 <a:tc>
@@ -3651,7 +3490,7 @@
                     <a:bodyPr/>
                     <a:lstStyle/>
                     <a:p>
-                      <a:pPr indent="0" marL="0">
+                      <a:pPr marL="0" indent="0">
                         <a:lnSpc>
                           <a:spcPts val="1960"/>
                         </a:lnSpc>
@@ -3675,7 +3514,7 @@
                       </a:endParaRPr>
                     </a:p>
                   </a:txBody>
-                  <a:tcPr marL="0" marR="0" marT="63500" marB="63500" anchor="t">
+                  <a:tcPr marL="0" marR="0" marT="63500" marB="63500">
                     <a:lnL w="12700" cap="flat" cmpd="sng" algn="ctr">
                       <a:solidFill>
                         <a:srgbClr val="CBCBCB"/>
@@ -3719,7 +3558,7 @@
                     <a:bodyPr/>
                     <a:lstStyle/>
                     <a:p>
-                      <a:pPr algn="r" indent="0" marL="0">
+                      <a:pPr marL="0" indent="0" algn="r">
                         <a:lnSpc>
                           <a:spcPts val="1960"/>
                         </a:lnSpc>
@@ -3743,7 +3582,7 @@
                       </a:endParaRPr>
                     </a:p>
                   </a:txBody>
-                  <a:tcPr marL="0" marR="0" marT="63500" marB="63500" anchor="t">
+                  <a:tcPr marL="0" marR="0" marT="63500" marB="63500">
                     <a:lnL w="12700" cap="flat" cmpd="sng" algn="ctr">
                       <a:solidFill>
                         <a:srgbClr val="CBCBCB"/>
@@ -3782,6 +3621,11 @@
                     </a:lnB>
                   </a:tcPr>
                 </a:tc>
+                <a:extLst>
+                  <a:ext uri="{0D108BD9-81ED-4DB2-BD59-A6C34878D82A}">
+                    <a16:rowId xmlns:a16="http://schemas.microsoft.com/office/drawing/2014/main" val="10001"/>
+                  </a:ext>
+                </a:extLst>
               </a:tr>
               <a:tr h="386080">
                 <a:tc>
@@ -3789,7 +3633,7 @@
                     <a:bodyPr/>
                     <a:lstStyle/>
                     <a:p>
-                      <a:pPr indent="0" marL="0">
+                      <a:pPr marL="0" indent="0">
                         <a:lnSpc>
                           <a:spcPts val="1960"/>
                         </a:lnSpc>
@@ -3813,7 +3657,7 @@
                       </a:endParaRPr>
                     </a:p>
                   </a:txBody>
-                  <a:tcPr marL="0" marR="0" marT="63500" marB="63500" anchor="t">
+                  <a:tcPr marL="0" marR="0" marT="63500" marB="63500">
                     <a:lnL w="12700" cap="flat" cmpd="sng" algn="ctr">
                       <a:solidFill>
                         <a:srgbClr val="CBCBCB"/>
@@ -3857,7 +3701,7 @@
                     <a:bodyPr/>
                     <a:lstStyle/>
                     <a:p>
-                      <a:pPr algn="r" indent="0" marL="0">
+                      <a:pPr marL="0" indent="0" algn="r">
                         <a:lnSpc>
                           <a:spcPts val="1960"/>
                         </a:lnSpc>
@@ -3881,7 +3725,7 @@
                       </a:endParaRPr>
                     </a:p>
                   </a:txBody>
-                  <a:tcPr marL="0" marR="0" marT="63500" marB="63500" anchor="t">
+                  <a:tcPr marL="0" marR="0" marT="63500" marB="63500">
                     <a:lnL w="12700" cap="flat" cmpd="sng" algn="ctr">
                       <a:solidFill>
                         <a:srgbClr val="CBCBCB"/>
@@ -3920,6 +3764,11 @@
                     </a:lnB>
                   </a:tcPr>
                 </a:tc>
+                <a:extLst>
+                  <a:ext uri="{0D108BD9-81ED-4DB2-BD59-A6C34878D82A}">
+                    <a16:rowId xmlns:a16="http://schemas.microsoft.com/office/drawing/2014/main" val="10002"/>
+                  </a:ext>
+                </a:extLst>
               </a:tr>
               <a:tr h="386080">
                 <a:tc>
@@ -3927,7 +3776,7 @@
                     <a:bodyPr/>
                     <a:lstStyle/>
                     <a:p>
-                      <a:pPr indent="0" marL="0">
+                      <a:pPr marL="0" indent="0">
                         <a:lnSpc>
                           <a:spcPts val="1960"/>
                         </a:lnSpc>
@@ -3951,7 +3800,7 @@
                       </a:endParaRPr>
                     </a:p>
                   </a:txBody>
-                  <a:tcPr marL="0" marR="0" marT="63500" marB="63500" anchor="t">
+                  <a:tcPr marL="0" marR="0" marT="63500" marB="63500">
                     <a:lnL w="12700" cap="flat" cmpd="sng" algn="ctr">
                       <a:solidFill>
                         <a:srgbClr val="CBCBCB"/>
@@ -3995,7 +3844,7 @@
                     <a:bodyPr/>
                     <a:lstStyle/>
                     <a:p>
-                      <a:pPr algn="r" indent="0" marL="0">
+                      <a:pPr marL="0" indent="0" algn="r">
                         <a:lnSpc>
                           <a:spcPts val="1960"/>
                         </a:lnSpc>
@@ -4019,7 +3868,7 @@
                       </a:endParaRPr>
                     </a:p>
                   </a:txBody>
-                  <a:tcPr marL="0" marR="0" marT="63500" marB="63500" anchor="t">
+                  <a:tcPr marL="0" marR="0" marT="63500" marB="63500">
                     <a:lnL w="12700" cap="flat" cmpd="sng" algn="ctr">
                       <a:solidFill>
                         <a:srgbClr val="CBCBCB"/>
@@ -4058,6 +3907,11 @@
                     </a:lnB>
                   </a:tcPr>
                 </a:tc>
+                <a:extLst>
+                  <a:ext uri="{0D108BD9-81ED-4DB2-BD59-A6C34878D82A}">
+                    <a16:rowId xmlns:a16="http://schemas.microsoft.com/office/drawing/2014/main" val="10003"/>
+                  </a:ext>
+                </a:extLst>
               </a:tr>
               <a:tr h="386080">
                 <a:tc>
@@ -4065,7 +3919,7 @@
                     <a:bodyPr/>
                     <a:lstStyle/>
                     <a:p>
-                      <a:pPr indent="0" marL="0">
+                      <a:pPr marL="0" indent="0">
                         <a:lnSpc>
                           <a:spcPts val="1960"/>
                         </a:lnSpc>
@@ -4089,7 +3943,7 @@
                       </a:endParaRPr>
                     </a:p>
                   </a:txBody>
-                  <a:tcPr marL="0" marR="0" marT="63500" marB="63500" anchor="t">
+                  <a:tcPr marL="0" marR="0" marT="63500" marB="63500">
                     <a:lnL w="12700" cap="flat" cmpd="sng" algn="ctr">
                       <a:solidFill>
                         <a:srgbClr val="CBCBCB"/>
@@ -4133,7 +3987,7 @@
                     <a:bodyPr/>
                     <a:lstStyle/>
                     <a:p>
-                      <a:pPr algn="r" indent="0" marL="0">
+                      <a:pPr marL="0" indent="0" algn="r">
                         <a:lnSpc>
                           <a:spcPts val="1960"/>
                         </a:lnSpc>
@@ -4157,7 +4011,7 @@
                       </a:endParaRPr>
                     </a:p>
                   </a:txBody>
-                  <a:tcPr marL="0" marR="0" marT="63500" marB="63500" anchor="t">
+                  <a:tcPr marL="0" marR="0" marT="63500" marB="63500">
                     <a:lnL w="12700" cap="flat" cmpd="sng" algn="ctr">
                       <a:solidFill>
                         <a:srgbClr val="CBCBCB"/>
@@ -4196,6 +4050,11 @@
                     </a:lnB>
                   </a:tcPr>
                 </a:tc>
+                <a:extLst>
+                  <a:ext uri="{0D108BD9-81ED-4DB2-BD59-A6C34878D82A}">
+                    <a16:rowId xmlns:a16="http://schemas.microsoft.com/office/drawing/2014/main" val="10004"/>
+                  </a:ext>
+                </a:extLst>
               </a:tr>
             </a:tbl>
           </a:graphicData>
@@ -4224,7 +4083,7 @@
           </a:bodyPr>
           <a:lstStyle/>
           <a:p>
-            <a:pPr algn="l" indent="0" marL="0">
+            <a:pPr marL="0" indent="0" algn="l">
               <a:lnSpc>
                 <a:spcPts val="1960"/>
               </a:lnSpc>
@@ -4268,8 +4127,20 @@
             <a:tbl>
               <a:tblPr/>
               <a:tblGrid>
-                <a:gridCol w="1391920"/>
-                <a:gridCol w="1391920"/>
+                <a:gridCol w="1391920">
+                  <a:extLst>
+                    <a:ext uri="{9D8B030D-6E8A-4147-A177-3AD203B41FA5}">
+                      <a16:colId xmlns:a16="http://schemas.microsoft.com/office/drawing/2014/main" val="20000"/>
+                    </a:ext>
+                  </a:extLst>
+                </a:gridCol>
+                <a:gridCol w="1391920">
+                  <a:extLst>
+                    <a:ext uri="{9D8B030D-6E8A-4147-A177-3AD203B41FA5}">
+                      <a16:colId xmlns:a16="http://schemas.microsoft.com/office/drawing/2014/main" val="20001"/>
+                    </a:ext>
+                  </a:extLst>
+                </a:gridCol>
               </a:tblGrid>
               <a:tr h="386080">
                 <a:tc>
@@ -4277,7 +4148,7 @@
                     <a:bodyPr/>
                     <a:lstStyle/>
                     <a:p>
-                      <a:pPr indent="0" marL="0">
+                      <a:pPr marL="0" indent="0">
                         <a:lnSpc>
                           <a:spcPts val="1960"/>
                         </a:lnSpc>
@@ -4301,7 +4172,7 @@
                       </a:endParaRPr>
                     </a:p>
                   </a:txBody>
-                  <a:tcPr marL="0" marR="0" marT="63500" marB="63500" anchor="t">
+                  <a:tcPr marL="0" marR="0" marT="63500" marB="63500">
                     <a:lnL w="12700" cap="flat" cmpd="sng" algn="ctr">
                       <a:solidFill>
                         <a:srgbClr val="CBCBCB"/>
@@ -4345,7 +4216,7 @@
                     <a:bodyPr/>
                     <a:lstStyle/>
                     <a:p>
-                      <a:pPr algn="r" indent="0" marL="0">
+                      <a:pPr marL="0" indent="0" algn="r">
                         <a:lnSpc>
                           <a:spcPts val="1960"/>
                         </a:lnSpc>
@@ -4369,7 +4240,7 @@
                       </a:endParaRPr>
                     </a:p>
                   </a:txBody>
-                  <a:tcPr marL="0" marR="0" marT="63500" marB="63500" anchor="t">
+                  <a:tcPr marL="0" marR="0" marT="63500" marB="63500">
                     <a:lnL w="12700" cap="flat" cmpd="sng" algn="ctr">
                       <a:solidFill>
                         <a:srgbClr val="CBCBCB"/>
@@ -4408,6 +4279,11 @@
                     </a:lnB>
                   </a:tcPr>
                 </a:tc>
+                <a:extLst>
+                  <a:ext uri="{0D108BD9-81ED-4DB2-BD59-A6C34878D82A}">
+                    <a16:rowId xmlns:a16="http://schemas.microsoft.com/office/drawing/2014/main" val="10000"/>
+                  </a:ext>
+                </a:extLst>
               </a:tr>
               <a:tr h="386080">
                 <a:tc>
@@ -4415,7 +4291,7 @@
                     <a:bodyPr/>
                     <a:lstStyle/>
                     <a:p>
-                      <a:pPr indent="0" marL="0">
+                      <a:pPr marL="0" indent="0">
                         <a:lnSpc>
                           <a:spcPts val="1960"/>
                         </a:lnSpc>
@@ -4439,7 +4315,7 @@
                       </a:endParaRPr>
                     </a:p>
                   </a:txBody>
-                  <a:tcPr marL="0" marR="0" marT="63500" marB="63500" anchor="t">
+                  <a:tcPr marL="0" marR="0" marT="63500" marB="63500">
                     <a:lnL w="12700" cap="flat" cmpd="sng" algn="ctr">
                       <a:solidFill>
                         <a:srgbClr val="CBCBCB"/>
@@ -4483,7 +4359,7 @@
                     <a:bodyPr/>
                     <a:lstStyle/>
                     <a:p>
-                      <a:pPr algn="r" indent="0" marL="0">
+                      <a:pPr marL="0" indent="0" algn="r">
                         <a:lnSpc>
                           <a:spcPts val="1960"/>
                         </a:lnSpc>
@@ -4507,7 +4383,7 @@
                       </a:endParaRPr>
                     </a:p>
                   </a:txBody>
-                  <a:tcPr marL="0" marR="0" marT="63500" marB="63500" anchor="t">
+                  <a:tcPr marL="0" marR="0" marT="63500" marB="63500">
                     <a:lnL w="12700" cap="flat" cmpd="sng" algn="ctr">
                       <a:solidFill>
                         <a:srgbClr val="CBCBCB"/>
@@ -4546,6 +4422,11 @@
                     </a:lnB>
                   </a:tcPr>
                 </a:tc>
+                <a:extLst>
+                  <a:ext uri="{0D108BD9-81ED-4DB2-BD59-A6C34878D82A}">
+                    <a16:rowId xmlns:a16="http://schemas.microsoft.com/office/drawing/2014/main" val="10001"/>
+                  </a:ext>
+                </a:extLst>
               </a:tr>
               <a:tr h="635000">
                 <a:tc>
@@ -4553,7 +4434,7 @@
                     <a:bodyPr/>
                     <a:lstStyle/>
                     <a:p>
-                      <a:pPr indent="0" marL="0">
+                      <a:pPr marL="0" indent="0">
                         <a:lnSpc>
                           <a:spcPts val="1960"/>
                         </a:lnSpc>
@@ -4577,7 +4458,7 @@
                       </a:endParaRPr>
                     </a:p>
                   </a:txBody>
-                  <a:tcPr marL="0" marR="0" marT="63500" marB="63500" anchor="t">
+                  <a:tcPr marL="0" marR="0" marT="63500" marB="63500">
                     <a:lnL w="12700" cap="flat" cmpd="sng" algn="ctr">
                       <a:solidFill>
                         <a:srgbClr val="CBCBCB"/>
@@ -4621,7 +4502,7 @@
                     <a:bodyPr/>
                     <a:lstStyle/>
                     <a:p>
-                      <a:pPr algn="r" indent="0" marL="0">
+                      <a:pPr marL="0" indent="0" algn="r">
                         <a:lnSpc>
                           <a:spcPts val="1960"/>
                         </a:lnSpc>
@@ -4645,7 +4526,7 @@
                       </a:endParaRPr>
                     </a:p>
                   </a:txBody>
-                  <a:tcPr marL="0" marR="0" marT="63500" marB="63500" anchor="t">
+                  <a:tcPr marL="0" marR="0" marT="63500" marB="63500">
                     <a:lnL w="12700" cap="flat" cmpd="sng" algn="ctr">
                       <a:solidFill>
                         <a:srgbClr val="CBCBCB"/>
@@ -4684,6 +4565,11 @@
                     </a:lnB>
                   </a:tcPr>
                 </a:tc>
+                <a:extLst>
+                  <a:ext uri="{0D108BD9-81ED-4DB2-BD59-A6C34878D82A}">
+                    <a16:rowId xmlns:a16="http://schemas.microsoft.com/office/drawing/2014/main" val="10002"/>
+                  </a:ext>
+                </a:extLst>
               </a:tr>
               <a:tr h="386080">
                 <a:tc>
@@ -4691,7 +4577,7 @@
                     <a:bodyPr/>
                     <a:lstStyle/>
                     <a:p>
-                      <a:pPr indent="0" marL="0">
+                      <a:pPr marL="0" indent="0">
                         <a:lnSpc>
                           <a:spcPts val="1960"/>
                         </a:lnSpc>
@@ -4715,7 +4601,7 @@
                       </a:endParaRPr>
                     </a:p>
                   </a:txBody>
-                  <a:tcPr marL="0" marR="0" marT="63500" marB="63500" anchor="t">
+                  <a:tcPr marL="0" marR="0" marT="63500" marB="63500">
                     <a:lnL w="12700" cap="flat" cmpd="sng" algn="ctr">
                       <a:solidFill>
                         <a:srgbClr val="CBCBCB"/>
@@ -4759,7 +4645,7 @@
                     <a:bodyPr/>
                     <a:lstStyle/>
                     <a:p>
-                      <a:pPr algn="r" indent="0" marL="0">
+                      <a:pPr marL="0" indent="0" algn="r">
                         <a:lnSpc>
                           <a:spcPts val="1960"/>
                         </a:lnSpc>
@@ -4783,7 +4669,7 @@
                       </a:endParaRPr>
                     </a:p>
                   </a:txBody>
-                  <a:tcPr marL="0" marR="0" marT="63500" marB="63500" anchor="t">
+                  <a:tcPr marL="0" marR="0" marT="63500" marB="63500">
                     <a:lnL w="12700" cap="flat" cmpd="sng" algn="ctr">
                       <a:solidFill>
                         <a:srgbClr val="CBCBCB"/>
@@ -4822,6 +4708,11 @@
                     </a:lnB>
                   </a:tcPr>
                 </a:tc>
+                <a:extLst>
+                  <a:ext uri="{0D108BD9-81ED-4DB2-BD59-A6C34878D82A}">
+                    <a16:rowId xmlns:a16="http://schemas.microsoft.com/office/drawing/2014/main" val="10003"/>
+                  </a:ext>
+                </a:extLst>
               </a:tr>
               <a:tr h="386080">
                 <a:tc>
@@ -4829,7 +4720,7 @@
                     <a:bodyPr/>
                     <a:lstStyle/>
                     <a:p>
-                      <a:pPr indent="0" marL="0">
+                      <a:pPr marL="0" indent="0">
                         <a:lnSpc>
                           <a:spcPts val="1960"/>
                         </a:lnSpc>
@@ -4853,7 +4744,7 @@
                       </a:endParaRPr>
                     </a:p>
                   </a:txBody>
-                  <a:tcPr marL="0" marR="0" marT="63500" marB="63500" anchor="t">
+                  <a:tcPr marL="0" marR="0" marT="63500" marB="63500">
                     <a:lnL w="12700" cap="flat" cmpd="sng" algn="ctr">
                       <a:solidFill>
                         <a:srgbClr val="CBCBCB"/>
@@ -4897,7 +4788,7 @@
                     <a:bodyPr/>
                     <a:lstStyle/>
                     <a:p>
-                      <a:pPr algn="r" indent="0" marL="0">
+                      <a:pPr marL="0" indent="0" algn="r">
                         <a:lnSpc>
                           <a:spcPts val="1960"/>
                         </a:lnSpc>
@@ -4921,7 +4812,7 @@
                       </a:endParaRPr>
                     </a:p>
                   </a:txBody>
-                  <a:tcPr marL="0" marR="0" marT="63500" marB="63500" anchor="t">
+                  <a:tcPr marL="0" marR="0" marT="63500" marB="63500">
                     <a:lnL w="12700" cap="flat" cmpd="sng" algn="ctr">
                       <a:solidFill>
                         <a:srgbClr val="CBCBCB"/>
@@ -4960,6 +4851,11 @@
                     </a:lnB>
                   </a:tcPr>
                 </a:tc>
+                <a:extLst>
+                  <a:ext uri="{0D108BD9-81ED-4DB2-BD59-A6C34878D82A}">
+                    <a16:rowId xmlns:a16="http://schemas.microsoft.com/office/drawing/2014/main" val="10004"/>
+                  </a:ext>
+                </a:extLst>
               </a:tr>
             </a:tbl>
           </a:graphicData>
@@ -4988,7 +4884,7 @@
           </a:bodyPr>
           <a:lstStyle/>
           <a:p>
-            <a:pPr algn="l" indent="0" marL="0">
+            <a:pPr marL="0" indent="0" algn="l">
               <a:lnSpc>
                 <a:spcPts val="2320"/>
               </a:lnSpc>
@@ -5316,4 +5212,319 @@
   <a:objectDefaults/>
   <a:extraClrSchemeLst/>
 </a:theme>
+</file>
+
+<file path=ppt/theme/theme2.xml><?xml version="1.0" encoding="utf-8"?>
+<a:theme xmlns:a="http://schemas.openxmlformats.org/drawingml/2006/main" name="Office Theme">
+  <a:themeElements>
+    <a:clrScheme name="Office">
+      <a:dk1>
+        <a:sysClr val="windowText" lastClr="000000"/>
+      </a:dk1>
+      <a:lt1>
+        <a:sysClr val="window" lastClr="FFFFFF"/>
+      </a:lt1>
+      <a:dk2>
+        <a:srgbClr val="0E2841"/>
+      </a:dk2>
+      <a:lt2>
+        <a:srgbClr val="E8E8E8"/>
+      </a:lt2>
+      <a:accent1>
+        <a:srgbClr val="156082"/>
+      </a:accent1>
+      <a:accent2>
+        <a:srgbClr val="E97132"/>
+      </a:accent2>
+      <a:accent3>
+        <a:srgbClr val="196B24"/>
+      </a:accent3>
+      <a:accent4>
+        <a:srgbClr val="0F9ED5"/>
+      </a:accent4>
+      <a:accent5>
+        <a:srgbClr val="A02B93"/>
+      </a:accent5>
+      <a:accent6>
+        <a:srgbClr val="4EA72E"/>
+      </a:accent6>
+      <a:hlink>
+        <a:srgbClr val="467886"/>
+      </a:hlink>
+      <a:folHlink>
+        <a:srgbClr val="96607D"/>
+      </a:folHlink>
+    </a:clrScheme>
+    <a:fontScheme name="Office">
+      <a:majorFont>
+        <a:latin typeface="Aptos Display" panose="02110004020202020204"/>
+        <a:ea typeface=""/>
+        <a:cs typeface=""/>
+        <a:font script="Jpan" typeface="游ゴシック Light"/>
+        <a:font script="Hang" typeface="맑은 고딕"/>
+        <a:font script="Hans" typeface="等线 Light"/>
+        <a:font script="Hant" typeface="新細明體"/>
+        <a:font script="Arab" typeface="Times New Roman"/>
+        <a:font script="Hebr" typeface="Times New Roman"/>
+        <a:font script="Thai" typeface="Angsana New"/>
+        <a:font script="Ethi" typeface="Nyala"/>
+        <a:font script="Beng" typeface="Vrinda"/>
+        <a:font script="Gujr" typeface="Shruti"/>
+        <a:font script="Khmr" typeface="MoolBoran"/>
+        <a:font script="Knda" typeface="Tunga"/>
+        <a:font script="Guru" typeface="Raavi"/>
+        <a:font script="Cans" typeface="Euphemia"/>
+        <a:font script="Cher" typeface="Plantagenet Cherokee"/>
+        <a:font script="Yiii" typeface="Microsoft Yi Baiti"/>
+        <a:font script="Tibt" typeface="Microsoft Himalaya"/>
+        <a:font script="Thaa" typeface="MV Boli"/>
+        <a:font script="Deva" typeface="Mangal"/>
+        <a:font script="Telu" typeface="Gautami"/>
+        <a:font script="Taml" typeface="Latha"/>
+        <a:font script="Syrc" typeface="Estrangelo Edessa"/>
+        <a:font script="Orya" typeface="Kalinga"/>
+        <a:font script="Mlym" typeface="Kartika"/>
+        <a:font script="Laoo" typeface="DokChampa"/>
+        <a:font script="Sinh" typeface="Iskoola Pota"/>
+        <a:font script="Mong" typeface="Mongolian Baiti"/>
+        <a:font script="Viet" typeface="Times New Roman"/>
+        <a:font script="Uigh" typeface="Microsoft Uighur"/>
+        <a:font script="Geor" typeface="Sylfaen"/>
+        <a:font script="Armn" typeface="Arial"/>
+        <a:font script="Bugi" typeface="Leelawadee UI"/>
+        <a:font script="Bopo" typeface="Microsoft JhengHei"/>
+        <a:font script="Java" typeface="Javanese Text"/>
+        <a:font script="Lisu" typeface="Segoe UI"/>
+        <a:font script="Mymr" typeface="Myanmar Text"/>
+        <a:font script="Nkoo" typeface="Ebrima"/>
+        <a:font script="Olck" typeface="Nirmala UI"/>
+        <a:font script="Osma" typeface="Ebrima"/>
+        <a:font script="Phag" typeface="Phagspa"/>
+        <a:font script="Syrn" typeface="Estrangelo Edessa"/>
+        <a:font script="Syrj" typeface="Estrangelo Edessa"/>
+        <a:font script="Syre" typeface="Estrangelo Edessa"/>
+        <a:font script="Sora" typeface="Nirmala UI"/>
+        <a:font script="Tale" typeface="Microsoft Tai Le"/>
+        <a:font script="Talu" typeface="Microsoft New Tai Lue"/>
+        <a:font script="Tfng" typeface="Ebrima"/>
+      </a:majorFont>
+      <a:minorFont>
+        <a:latin typeface="Aptos" panose="02110004020202020204"/>
+        <a:ea typeface=""/>
+        <a:cs typeface=""/>
+        <a:font script="Jpan" typeface="游ゴシック"/>
+        <a:font script="Hang" typeface="맑은 고딕"/>
+        <a:font script="Hans" typeface="等线"/>
+        <a:font script="Hant" typeface="新細明體"/>
+        <a:font script="Arab" typeface="Arial"/>
+        <a:font script="Hebr" typeface="Arial"/>
+        <a:font script="Thai" typeface="Cordia New"/>
+        <a:font script="Ethi" typeface="Nyala"/>
+        <a:font script="Beng" typeface="Vrinda"/>
+        <a:font script="Gujr" typeface="Shruti"/>
+        <a:font script="Khmr" typeface="DaunPenh"/>
+        <a:font script="Knda" typeface="Tunga"/>
+        <a:font script="Guru" typeface="Raavi"/>
+        <a:font script="Cans" typeface="Euphemia"/>
+        <a:font script="Cher" typeface="Plantagenet Cherokee"/>
+        <a:font script="Yiii" typeface="Microsoft Yi Baiti"/>
+        <a:font script="Tibt" typeface="Microsoft Himalaya"/>
+        <a:font script="Thaa" typeface="MV Boli"/>
+        <a:font script="Deva" typeface="Mangal"/>
+        <a:font script="Telu" typeface="Gautami"/>
+        <a:font script="Taml" typeface="Latha"/>
+        <a:font script="Syrc" typeface="Estrangelo Edessa"/>
+        <a:font script="Orya" typeface="Kalinga"/>
+        <a:font script="Mlym" typeface="Kartika"/>
+        <a:font script="Laoo" typeface="DokChampa"/>
+        <a:font script="Sinh" typeface="Iskoola Pota"/>
+        <a:font script="Mong" typeface="Mongolian Baiti"/>
+        <a:font script="Viet" typeface="Arial"/>
+        <a:font script="Uigh" typeface="Microsoft Uighur"/>
+        <a:font script="Geor" typeface="Sylfaen"/>
+        <a:font script="Armn" typeface="Arial"/>
+        <a:font script="Bugi" typeface="Leelawadee UI"/>
+        <a:font script="Bopo" typeface="Microsoft JhengHei"/>
+        <a:font script="Java" typeface="Javanese Text"/>
+        <a:font script="Lisu" typeface="Segoe UI"/>
+        <a:font script="Mymr" typeface="Myanmar Text"/>
+        <a:font script="Nkoo" typeface="Ebrima"/>
+        <a:font script="Olck" typeface="Nirmala UI"/>
+        <a:font script="Osma" typeface="Ebrima"/>
+        <a:font script="Phag" typeface="Phagspa"/>
+        <a:font script="Syrn" typeface="Estrangelo Edessa"/>
+        <a:font script="Syrj" typeface="Estrangelo Edessa"/>
+        <a:font script="Syre" typeface="Estrangelo Edessa"/>
+        <a:font script="Sora" typeface="Nirmala UI"/>
+        <a:font script="Tale" typeface="Microsoft Tai Le"/>
+        <a:font script="Talu" typeface="Microsoft New Tai Lue"/>
+        <a:font script="Tfng" typeface="Ebrima"/>
+      </a:minorFont>
+    </a:fontScheme>
+    <a:fmtScheme name="Office">
+      <a:fillStyleLst>
+        <a:solidFill>
+          <a:schemeClr val="phClr"/>
+        </a:solidFill>
+        <a:gradFill rotWithShape="1">
+          <a:gsLst>
+            <a:gs pos="0">
+              <a:schemeClr val="phClr">
+                <a:lumMod val="110000"/>
+                <a:satMod val="105000"/>
+                <a:tint val="67000"/>
+              </a:schemeClr>
+            </a:gs>
+            <a:gs pos="50000">
+              <a:schemeClr val="phClr">
+                <a:lumMod val="105000"/>
+                <a:satMod val="103000"/>
+                <a:tint val="73000"/>
+              </a:schemeClr>
+            </a:gs>
+            <a:gs pos="100000">
+              <a:schemeClr val="phClr">
+                <a:lumMod val="105000"/>
+                <a:satMod val="109000"/>
+                <a:tint val="81000"/>
+              </a:schemeClr>
+            </a:gs>
+          </a:gsLst>
+          <a:lin ang="5400000" scaled="0"/>
+        </a:gradFill>
+        <a:gradFill rotWithShape="1">
+          <a:gsLst>
+            <a:gs pos="0">
+              <a:schemeClr val="phClr">
+                <a:satMod val="103000"/>
+                <a:lumMod val="102000"/>
+                <a:tint val="94000"/>
+              </a:schemeClr>
+            </a:gs>
+            <a:gs pos="50000">
+              <a:schemeClr val="phClr">
+                <a:satMod val="110000"/>
+                <a:lumMod val="100000"/>
+                <a:shade val="100000"/>
+              </a:schemeClr>
+            </a:gs>
+            <a:gs pos="100000">
+              <a:schemeClr val="phClr">
+                <a:lumMod val="99000"/>
+                <a:satMod val="120000"/>
+                <a:shade val="78000"/>
+              </a:schemeClr>
+            </a:gs>
+          </a:gsLst>
+          <a:lin ang="5400000" scaled="0"/>
+        </a:gradFill>
+      </a:fillStyleLst>
+      <a:lnStyleLst>
+        <a:ln w="12700" cap="flat" cmpd="sng" algn="ctr">
+          <a:solidFill>
+            <a:schemeClr val="phClr"/>
+          </a:solidFill>
+          <a:prstDash val="solid"/>
+          <a:miter lim="800000"/>
+        </a:ln>
+        <a:ln w="19050" cap="flat" cmpd="sng" algn="ctr">
+          <a:solidFill>
+            <a:schemeClr val="phClr"/>
+          </a:solidFill>
+          <a:prstDash val="solid"/>
+          <a:miter lim="800000"/>
+        </a:ln>
+        <a:ln w="25400" cap="flat" cmpd="sng" algn="ctr">
+          <a:solidFill>
+            <a:schemeClr val="phClr"/>
+          </a:solidFill>
+          <a:prstDash val="solid"/>
+          <a:miter lim="800000"/>
+        </a:ln>
+      </a:lnStyleLst>
+      <a:effectStyleLst>
+        <a:effectStyle>
+          <a:effectLst/>
+        </a:effectStyle>
+        <a:effectStyle>
+          <a:effectLst/>
+        </a:effectStyle>
+        <a:effectStyle>
+          <a:effectLst>
+            <a:outerShdw blurRad="57150" dist="19050" dir="5400000" algn="ctr" rotWithShape="0">
+              <a:srgbClr val="000000">
+                <a:alpha val="63000"/>
+              </a:srgbClr>
+            </a:outerShdw>
+          </a:effectLst>
+        </a:effectStyle>
+      </a:effectStyleLst>
+      <a:bgFillStyleLst>
+        <a:solidFill>
+          <a:schemeClr val="phClr"/>
+        </a:solidFill>
+        <a:solidFill>
+          <a:schemeClr val="phClr">
+            <a:tint val="95000"/>
+            <a:satMod val="170000"/>
+          </a:schemeClr>
+        </a:solidFill>
+        <a:gradFill rotWithShape="1">
+          <a:gsLst>
+            <a:gs pos="0">
+              <a:schemeClr val="phClr">
+                <a:tint val="93000"/>
+                <a:satMod val="150000"/>
+                <a:shade val="98000"/>
+                <a:lumMod val="102000"/>
+              </a:schemeClr>
+            </a:gs>
+            <a:gs pos="50000">
+              <a:schemeClr val="phClr">
+                <a:tint val="98000"/>
+                <a:satMod val="130000"/>
+                <a:shade val="90000"/>
+                <a:lumMod val="103000"/>
+              </a:schemeClr>
+            </a:gs>
+            <a:gs pos="100000">
+              <a:schemeClr val="phClr">
+                <a:shade val="63000"/>
+                <a:satMod val="120000"/>
+              </a:schemeClr>
+            </a:gs>
+          </a:gsLst>
+          <a:lin ang="5400000" scaled="0"/>
+        </a:gradFill>
+      </a:bgFillStyleLst>
+    </a:fmtScheme>
+  </a:themeElements>
+  <a:objectDefaults>
+    <a:lnDef>
+      <a:spPr/>
+      <a:bodyPr/>
+      <a:lstStyle/>
+      <a:style>
+        <a:lnRef idx="2">
+          <a:schemeClr val="accent1"/>
+        </a:lnRef>
+        <a:fillRef idx="0">
+          <a:schemeClr val="accent1"/>
+        </a:fillRef>
+        <a:effectRef idx="1">
+          <a:schemeClr val="accent1"/>
+        </a:effectRef>
+        <a:fontRef idx="minor">
+          <a:schemeClr val="tx1"/>
+        </a:fontRef>
+      </a:style>
+    </a:lnDef>
+  </a:objectDefaults>
+  <a:extraClrSchemeLst/>
+  <a:extLst>
+    <a:ext uri="{05A4C25C-085E-4340-85A3-A5531E510DB2}">
+      <thm15:themeFamily xmlns:thm15="http://schemas.microsoft.com/office/thememl/2012/main" name="Office Theme" id="{2E142A2C-CD16-42D6-873A-C26D2A0506FA}" vid="{1BDDFF52-6CD6-40A5-AB3C-68EB2F1E4D0A}"/>
+    </a:ext>
+  </a:extLst>
+</a:theme>
 </file>